--- a/test-corpus/word-verification/er-diagram.pptx
+++ b/test-corpus/word-verification/er-diagram.pptx
@@ -144,7 +144,7 @@
         </p:nvCxnSpPr>
         <p:spPr>
           <a:xfrm flipH="1">
-            <a:off x="6011059" y="2403958"/>
+            <a:off x="3889651" y="2403958"/>
             <a:ext cx="209635" cy="752094"/>
           </a:xfrm>
           <a:prstGeom prst="line">
@@ -167,7 +167,7 @@
         </p:nvSpPr>
         <p:spPr>
           <a:xfrm>
-            <a:off x="5896695" y="2672563"/>
+            <a:off x="3775287" y="2672563"/>
             <a:ext cx="438363" cy="214884"/>
           </a:xfrm>
           <a:prstGeom prst="rect">
@@ -209,7 +209,7 @@
         </p:nvCxnSpPr>
         <p:spPr>
           <a:xfrm>
-            <a:off x="6011059" y="4273448"/>
+            <a:off x="3889651" y="4273448"/>
             <a:ext cx="209635" cy="752094"/>
           </a:xfrm>
           <a:prstGeom prst="line">
@@ -232,7 +232,7 @@
         </p:nvSpPr>
         <p:spPr>
           <a:xfrm>
-            <a:off x="5845123" y="4542053"/>
+            <a:off x="3723715" y="4542053"/>
             <a:ext cx="541508" cy="214884"/>
           </a:xfrm>
           <a:prstGeom prst="rect">
@@ -274,7 +274,7 @@
         </p:nvCxnSpPr>
         <p:spPr>
           <a:xfrm>
-            <a:off x="6376423" y="2403958"/>
+            <a:off x="4255015" y="2403958"/>
             <a:ext cx="1" cy="2621585"/>
           </a:xfrm>
           <a:prstGeom prst="line">
@@ -298,7 +298,7 @@
         </p:nvSpPr>
         <p:spPr>
           <a:xfrm>
-            <a:off x="6131455" y="3607308"/>
+            <a:off x="4010047" y="3607308"/>
             <a:ext cx="489936" cy="214884"/>
           </a:xfrm>
           <a:prstGeom prst="rect">
@@ -340,7 +340,7 @@
         </p:nvSpPr>
         <p:spPr>
           <a:xfrm>
-            <a:off x="5791939" y="1286561"/>
+            <a:off x="3670531" y="1286561"/>
             <a:ext cx="1168969" cy="1117397"/>
           </a:xfrm>
           <a:prstGeom prst="rect">
@@ -364,7 +364,7 @@
         </p:nvSpPr>
         <p:spPr>
           <a:xfrm>
-            <a:off x="5791939" y="1286561"/>
+            <a:off x="3670531" y="1286561"/>
             <a:ext cx="1168969" cy="343814"/>
           </a:xfrm>
           <a:prstGeom prst="rect">
@@ -386,7 +386,7 @@
         </p:nvSpPr>
         <p:spPr>
           <a:xfrm>
-            <a:off x="5791939" y="1625003"/>
+            <a:off x="3670531" y="1625003"/>
             <a:ext cx="1168969" cy="10744"/>
           </a:xfrm>
           <a:prstGeom prst="rect">
@@ -408,7 +408,7 @@
         </p:nvSpPr>
         <p:spPr>
           <a:xfrm>
-            <a:off x="5791939" y="1286561"/>
+            <a:off x="3670531" y="1286561"/>
             <a:ext cx="1168969" cy="343814"/>
           </a:xfrm>
           <a:prstGeom prst="rect">
@@ -450,7 +450,7 @@
         </p:nvSpPr>
         <p:spPr>
           <a:xfrm>
-            <a:off x="5899381" y="1630375"/>
+            <a:off x="3777973" y="1630375"/>
             <a:ext cx="954085" cy="773582"/>
           </a:xfrm>
           <a:prstGeom prst="rect">
@@ -528,7 +528,7 @@
         </p:nvSpPr>
         <p:spPr>
           <a:xfrm>
-            <a:off x="5189190" y="3156052"/>
+            <a:off x="3067782" y="3156052"/>
             <a:ext cx="1332281" cy="1117397"/>
           </a:xfrm>
           <a:prstGeom prst="rect">
@@ -552,7 +552,7 @@
         </p:nvSpPr>
         <p:spPr>
           <a:xfrm>
-            <a:off x="5189190" y="3156052"/>
+            <a:off x="3067782" y="3156052"/>
             <a:ext cx="1332281" cy="343814"/>
           </a:xfrm>
           <a:prstGeom prst="rect">
@@ -574,7 +574,7 @@
         </p:nvSpPr>
         <p:spPr>
           <a:xfrm>
-            <a:off x="5189190" y="3494493"/>
+            <a:off x="3067782" y="3494493"/>
             <a:ext cx="1332281" cy="10744"/>
           </a:xfrm>
           <a:prstGeom prst="rect">
@@ -596,7 +596,7 @@
         </p:nvSpPr>
         <p:spPr>
           <a:xfrm>
-            <a:off x="5189190" y="3156052"/>
+            <a:off x="3067782" y="3156052"/>
             <a:ext cx="1332281" cy="343814"/>
           </a:xfrm>
           <a:prstGeom prst="rect">
@@ -638,7 +638,7 @@
         </p:nvSpPr>
         <p:spPr>
           <a:xfrm>
-            <a:off x="5296632" y="3499866"/>
+            <a:off x="3175224" y="3499866"/>
             <a:ext cx="1117397" cy="773582"/>
           </a:xfrm>
           <a:prstGeom prst="rect">
@@ -716,7 +716,7 @@
         </p:nvSpPr>
         <p:spPr>
           <a:xfrm>
-            <a:off x="5750037" y="5025542"/>
+            <a:off x="3628629" y="5025542"/>
             <a:ext cx="1252774" cy="1117397"/>
           </a:xfrm>
           <a:prstGeom prst="rect">
@@ -740,7 +740,7 @@
         </p:nvSpPr>
         <p:spPr>
           <a:xfrm>
-            <a:off x="5750037" y="5025542"/>
+            <a:off x="3628629" y="5025542"/>
             <a:ext cx="1252774" cy="343814"/>
           </a:xfrm>
           <a:prstGeom prst="rect">
@@ -762,7 +762,7 @@
         </p:nvSpPr>
         <p:spPr>
           <a:xfrm>
-            <a:off x="5750037" y="5363984"/>
+            <a:off x="3628629" y="5363984"/>
             <a:ext cx="1252774" cy="10744"/>
           </a:xfrm>
           <a:prstGeom prst="rect">
@@ -784,7 +784,7 @@
         </p:nvSpPr>
         <p:spPr>
           <a:xfrm>
-            <a:off x="5750037" y="5025542"/>
+            <a:off x="3628629" y="5025542"/>
             <a:ext cx="1252774" cy="343814"/>
           </a:xfrm>
           <a:prstGeom prst="rect">
@@ -826,7 +826,7 @@
         </p:nvSpPr>
         <p:spPr>
           <a:xfrm>
-            <a:off x="5857479" y="5369357"/>
+            <a:off x="3736071" y="5369357"/>
             <a:ext cx="1037890" cy="773582"/>
           </a:xfrm>
           <a:prstGeom prst="rect">
@@ -892,6 +892,283 @@
                 </a:solidFill>
               </a:rPr>
               <a:t>string product</a:t>
+            </a:r>
+          </a:p>
+        </p:txBody>
+      </p:sp>
+      <p:sp>
+        <p:nvSpPr>
+          <p:cNvPr id="4" name="Mermaid source"/>
+          <p:cNvSpPr/>
+          <p:nvPr/>
+        </p:nvSpPr>
+        <p:spPr>
+          <a:xfrm>
+            <a:off x="7674864" y="1028700"/>
+            <a:ext cx="4059936" cy="5372100"/>
+          </a:xfrm>
+          <a:prstGeom prst="rect">
+            <a:avLst/>
+          </a:prstGeom>
+          <a:solidFill>
+            <a:srgbClr val="F3F4F6"/>
+          </a:solidFill>
+          <a:ln w="9525">
+            <a:solidFill>
+              <a:srgbClr val="D1D5DB"/>
+            </a:solidFill>
+          </a:ln>
+        </p:spPr>
+        <p:txBody>
+          <a:bodyPr wrap="square" lIns="91440" tIns="45720" rIns="91440" bIns="45720" anchor="t">
+            <a:noAutofit/>
+          </a:bodyPr>
+          <a:lstStyle/>
+          <a:p>
+            <a:pPr algn="l"/>
+            <a:r>
+              <a:rPr lang="en-US" sz="1400" dirty="0">
+                <a:solidFill>
+                  <a:srgbClr val="1F2937"/>
+                </a:solidFill>
+                <a:latin typeface="Consolas"/>
+                <a:cs typeface="Consolas"/>
+              </a:rPr>
+              <a:t>erDiagram</a:t>
+            </a:r>
+          </a:p>
+          <a:p>
+            <a:pPr algn="l"/>
+            <a:r>
+              <a:rPr lang="en-US" sz="1400" dirty="0">
+                <a:solidFill>
+                  <a:srgbClr val="1F2937"/>
+                </a:solidFill>
+                <a:latin typeface="Consolas"/>
+                <a:cs typeface="Consolas"/>
+              </a:rPr>
+              <a:t>  CUSTOMER {</a:t>
+            </a:r>
+          </a:p>
+          <a:p>
+            <a:pPr algn="l"/>
+            <a:r>
+              <a:rPr lang="en-US" sz="1400" dirty="0">
+                <a:solidFill>
+                  <a:srgbClr val="1F2937"/>
+                </a:solidFill>
+                <a:latin typeface="Consolas"/>
+                <a:cs typeface="Consolas"/>
+              </a:rPr>
+              <a:t>    int id PK</a:t>
+            </a:r>
+          </a:p>
+          <a:p>
+            <a:pPr algn="l"/>
+            <a:r>
+              <a:rPr lang="en-US" sz="1400" dirty="0">
+                <a:solidFill>
+                  <a:srgbClr val="1F2937"/>
+                </a:solidFill>
+                <a:latin typeface="Consolas"/>
+                <a:cs typeface="Consolas"/>
+              </a:rPr>
+              <a:t>    string email UK</a:t>
+            </a:r>
+          </a:p>
+          <a:p>
+            <a:pPr algn="l"/>
+            <a:r>
+              <a:rPr lang="en-US" sz="1400" dirty="0">
+                <a:solidFill>
+                  <a:srgbClr val="1F2937"/>
+                </a:solidFill>
+                <a:latin typeface="Consolas"/>
+                <a:cs typeface="Consolas"/>
+              </a:rPr>
+              <a:t>    string name</a:t>
+            </a:r>
+          </a:p>
+          <a:p>
+            <a:pPr algn="l"/>
+            <a:r>
+              <a:rPr lang="en-US" sz="1400" dirty="0">
+                <a:solidFill>
+                  <a:srgbClr val="1F2937"/>
+                </a:solidFill>
+                <a:latin typeface="Consolas"/>
+                <a:cs typeface="Consolas"/>
+              </a:rPr>
+              <a:t>  }</a:t>
+            </a:r>
+          </a:p>
+          <a:p>
+            <a:pPr algn="l"/>
+            <a:r>
+              <a:rPr lang="en-US" sz="1400" dirty="0">
+                <a:solidFill>
+                  <a:srgbClr val="1F2937"/>
+                </a:solidFill>
+                <a:latin typeface="Consolas"/>
+                <a:cs typeface="Consolas"/>
+              </a:rPr>
+              <a:t>  ORDER {</a:t>
+            </a:r>
+          </a:p>
+          <a:p>
+            <a:pPr algn="l"/>
+            <a:r>
+              <a:rPr lang="en-US" sz="1400" dirty="0">
+                <a:solidFill>
+                  <a:srgbClr val="1F2937"/>
+                </a:solidFill>
+                <a:latin typeface="Consolas"/>
+                <a:cs typeface="Consolas"/>
+              </a:rPr>
+              <a:t>    int id PK</a:t>
+            </a:r>
+          </a:p>
+          <a:p>
+            <a:pPr algn="l"/>
+            <a:r>
+              <a:rPr lang="en-US" sz="1400" dirty="0">
+                <a:solidFill>
+                  <a:srgbClr val="1F2937"/>
+                </a:solidFill>
+                <a:latin typeface="Consolas"/>
+                <a:cs typeface="Consolas"/>
+              </a:rPr>
+              <a:t>    int customer_id FK</a:t>
+            </a:r>
+          </a:p>
+          <a:p>
+            <a:pPr algn="l"/>
+            <a:r>
+              <a:rPr lang="en-US" sz="1400" dirty="0">
+                <a:solidFill>
+                  <a:srgbClr val="1F2937"/>
+                </a:solidFill>
+                <a:latin typeface="Consolas"/>
+                <a:cs typeface="Consolas"/>
+              </a:rPr>
+              <a:t>    string status</a:t>
+            </a:r>
+          </a:p>
+          <a:p>
+            <a:pPr algn="l"/>
+            <a:r>
+              <a:rPr lang="en-US" sz="1400" dirty="0">
+                <a:solidFill>
+                  <a:srgbClr val="1F2937"/>
+                </a:solidFill>
+                <a:latin typeface="Consolas"/>
+                <a:cs typeface="Consolas"/>
+              </a:rPr>
+              <a:t>  }</a:t>
+            </a:r>
+          </a:p>
+          <a:p>
+            <a:pPr algn="l"/>
+            <a:r>
+              <a:rPr lang="en-US" sz="1400" dirty="0">
+                <a:solidFill>
+                  <a:srgbClr val="1F2937"/>
+                </a:solidFill>
+                <a:latin typeface="Consolas"/>
+                <a:cs typeface="Consolas"/>
+              </a:rPr>
+              <a:t>  LINE-ITEM {</a:t>
+            </a:r>
+          </a:p>
+          <a:p>
+            <a:pPr algn="l"/>
+            <a:r>
+              <a:rPr lang="en-US" sz="1400" dirty="0">
+                <a:solidFill>
+                  <a:srgbClr val="1F2937"/>
+                </a:solidFill>
+                <a:latin typeface="Consolas"/>
+                <a:cs typeface="Consolas"/>
+              </a:rPr>
+              <a:t>    int id PK</a:t>
+            </a:r>
+          </a:p>
+          <a:p>
+            <a:pPr algn="l"/>
+            <a:r>
+              <a:rPr lang="en-US" sz="1400" dirty="0">
+                <a:solidFill>
+                  <a:srgbClr val="1F2937"/>
+                </a:solidFill>
+                <a:latin typeface="Consolas"/>
+                <a:cs typeface="Consolas"/>
+              </a:rPr>
+              <a:t>    int order_id FK</a:t>
+            </a:r>
+          </a:p>
+          <a:p>
+            <a:pPr algn="l"/>
+            <a:r>
+              <a:rPr lang="en-US" sz="1400" dirty="0">
+                <a:solidFill>
+                  <a:srgbClr val="1F2937"/>
+                </a:solidFill>
+                <a:latin typeface="Consolas"/>
+                <a:cs typeface="Consolas"/>
+              </a:rPr>
+              <a:t>    string product</a:t>
+            </a:r>
+          </a:p>
+          <a:p>
+            <a:pPr algn="l"/>
+            <a:r>
+              <a:rPr lang="en-US" sz="1400" dirty="0">
+                <a:solidFill>
+                  <a:srgbClr val="1F2937"/>
+                </a:solidFill>
+                <a:latin typeface="Consolas"/>
+                <a:cs typeface="Consolas"/>
+              </a:rPr>
+              <a:t>  }</a:t>
+            </a:r>
+          </a:p>
+          <a:p>
+            <a:pPr algn="l"/>
+            <a:r>
+              <a:rPr lang="en-US" sz="1400" dirty="0">
+                <a:solidFill>
+                  <a:srgbClr val="1F2937"/>
+                </a:solidFill>
+                <a:latin typeface="Consolas"/>
+                <a:cs typeface="Consolas"/>
+              </a:rPr>
+              <a:t>  CUSTOMER ||--o{ ORDER : places</a:t>
+            </a:r>
+          </a:p>
+          <a:p>
+            <a:pPr algn="l"/>
+            <a:r>
+              <a:rPr lang="en-US" sz="1400" dirty="0">
+                <a:solidFill>
+                  <a:srgbClr val="1F2937"/>
+                </a:solidFill>
+                <a:latin typeface="Consolas"/>
+                <a:cs typeface="Consolas"/>
+              </a:rPr>
+              <a:t>  ORDER ||--|{ LINE-ITEM : contains</a:t>
+            </a:r>
+          </a:p>
+          <a:p>
+            <a:pPr algn="l"/>
+            <a:r>
+              <a:rPr lang="en-US" sz="1400" dirty="0">
+                <a:solidFill>
+                  <a:srgbClr val="1F2937"/>
+                </a:solidFill>
+                <a:latin typeface="Consolas"/>
+                <a:cs typeface="Consolas"/>
+              </a:rPr>
+              <a:t>  CUSTOMER }|..|{ LINE-ITEM : "reviews"</a:t>
             </a:r>
           </a:p>
         </p:txBody>
